--- a/ppt/BigData03-MachineLearning.pptx
+++ b/ppt/BigData03-MachineLearning.pptx
@@ -440,6 +440,34 @@
   </p:cSld>
   <p:clrMap bg1="lt1" tx1="dk1" bg2="lt2" tx2="dk2" accent1="accent1" accent2="accent2" accent3="accent3" accent4="accent4" accent5="accent5" accent6="accent6" hlink="hlink" folHlink="folHlink"/>
 </p:handoutMaster>
+</file>
+
+<file path=ppt/ink/ink1.xml><?xml version="1.0" encoding="utf-8"?>
+<inkml:ink xmlns:inkml="http://www.w3.org/2003/InkML">
+  <inkml:definitions>
+    <inkml:context xml:id="ctx0">
+      <inkml:inkSource xml:id="inkSrc0">
+        <inkml:traceFormat>
+          <inkml:channel name="X" type="integer" min="-1366" max="1920" units="cm"/>
+          <inkml:channel name="Y" type="integer" max="1080" units="cm"/>
+          <inkml:channel name="T" type="integer" max="2.14748E9" units="dev"/>
+        </inkml:traceFormat>
+        <inkml:channelProperties>
+          <inkml:channelProperty channel="X" name="resolution" value="95.52325" units="1/cm"/>
+          <inkml:channelProperty channel="Y" name="resolution" value="55.95855" units="1/cm"/>
+          <inkml:channelProperty channel="T" name="resolution" value="1" units="1/dev"/>
+        </inkml:channelProperties>
+      </inkml:inkSource>
+      <inkml:timestamp xml:id="ts0" timeString="2025-07-25T09:07:01.433"/>
+    </inkml:context>
+    <inkml:brush xml:id="br0">
+      <inkml:brushProperty name="width" value="0.05292" units="cm"/>
+      <inkml:brushProperty name="height" value="0.05292" units="cm"/>
+      <inkml:brushProperty name="color" value="#FF0000"/>
+    </inkml:brush>
+  </inkml:definitions>
+  <inkml:trace contextRef="#ctx0" brushRef="#br0">20141 6052 0,'-25'0'78,"-471"0"-47,-496 75 0,124 123 0,768-148-15,1 24 0,-25 25-1,0 149 1,-25-24 0,25-26-1,99-74-15,25-49 16,-24 148-1,24-25 1,0 1 0,0-1-1,0 50 1,0 25 15,99 99-15,124 25-1,50-25 1,49-124 0,1-49-1,-249-175-15,224 76 16,173-26 0,-49-74-1,74 0 1,-74-99-1,-1-50 1,-123 75 0,-199-1 15,-74 75-31,0-25 16,0-24-1,-25-1-15,24 0 16,76-173-1,-51-124 1,-49-50 0,0-149-1,-25 125 1,-74-51 0,-74 26-1,49-1 1,-25 125-1,-50 49 1,-74 0 0,199 199-1,-174-149-15,50 24 32,24 26-17,75 73 1,49 76-1</inkml:trace>
+</inkml:ink>
 </file>
 
 <file path=ppt/notesMasters/notesMaster1.xml><?xml version="1.0" encoding="utf-8"?>
@@ -6551,6 +6579,57 @@
           </a:prstGeom>
         </p:spPr>
       </p:pic>
+      <mc:AlternateContent xmlns:mc="http://schemas.openxmlformats.org/markup-compatibility/2006">
+        <mc:Choice xmlns:p14="http://schemas.microsoft.com/office/powerpoint/2010/main" Requires="p14">
+          <p:contentPart p14:bwMode="auto" r:id="rId4">
+            <p14:nvContentPartPr>
+              <p14:cNvPr id="4" name="Encre 3">
+                <a:extLst>
+                  <a:ext uri="{FF2B5EF4-FFF2-40B4-BE49-F238E27FC236}">
+                    <a16:creationId xmlns:a16="http://schemas.microsoft.com/office/drawing/2014/main" id="{08A30A15-140F-195B-C6C9-6F46A81B7C7E}"/>
+                  </a:ext>
+                </a:extLst>
+              </p14:cNvPr>
+              <p14:cNvContentPartPr/>
+              <p14:nvPr/>
+            </p14:nvContentPartPr>
+            <p14:xfrm>
+              <a:off x="6116760" y="1803960"/>
+              <a:ext cx="1616400" cy="1991520"/>
+            </p14:xfrm>
+          </p:contentPart>
+        </mc:Choice>
+        <mc:Fallback>
+          <p:pic>
+            <p:nvPicPr>
+              <p:cNvPr id="4" name="Encre 3">
+                <a:extLst>
+                  <a:ext uri="{FF2B5EF4-FFF2-40B4-BE49-F238E27FC236}">
+                    <a16:creationId xmlns:a16="http://schemas.microsoft.com/office/drawing/2014/main" id="{08A30A15-140F-195B-C6C9-6F46A81B7C7E}"/>
+                  </a:ext>
+                </a:extLst>
+              </p:cNvPr>
+              <p:cNvPicPr/>
+              <p:nvPr/>
+            </p:nvPicPr>
+            <p:blipFill>
+              <a:blip r:embed="rId5"/>
+              <a:stretch>
+                <a:fillRect/>
+              </a:stretch>
+            </p:blipFill>
+            <p:spPr>
+              <a:xfrm>
+                <a:off x="6107400" y="1794600"/>
+                <a:ext cx="1635120" cy="2010240"/>
+              </a:xfrm>
+              <a:prstGeom prst="rect">
+                <a:avLst/>
+              </a:prstGeom>
+            </p:spPr>
+          </p:pic>
+        </mc:Fallback>
+      </mc:AlternateContent>
     </p:spTree>
     <p:extLst>
       <p:ext uri="{BB962C8B-B14F-4D97-AF65-F5344CB8AC3E}">
@@ -8646,6 +8725,21 @@
             <a:r>
               <a:rPr lang="fr-FR" dirty="0"/>
               <a:t>Notre exemple montre une régression linéaire</a:t>
+            </a:r>
+          </a:p>
+          <a:p>
+            <a:pPr lvl="1"/>
+            <a:r>
+              <a:rPr lang="fr-FR" dirty="0"/>
+              <a:t>f(x) = </a:t>
+            </a:r>
+            <a:r>
+              <a:rPr lang="fr-FR" dirty="0" err="1"/>
+              <a:t>ax</a:t>
+            </a:r>
+            <a:r>
+              <a:rPr lang="fr-FR" dirty="0"/>
+              <a:t> + b</a:t>
             </a:r>
           </a:p>
           <a:p>
